--- a/data/employees/EMP071/AST-EMP071-01.pptx
+++ b/data/employees/EMP071/AST-EMP071-01.pptx
@@ -9,6 +9,7 @@
     <p:sldId id="257" r:id="rId8"/>
     <p:sldId id="258" r:id="rId9"/>
     <p:sldId id="259" r:id="rId10"/>
+    <p:sldId id="260" r:id="rId11"/>
   </p:sldIdLst>
   <p:sldSz cx="9144000" cy="6858000" type="screen4x3"/>
   <p:notesSz cx="6858000" cy="9144000"/>
@@ -3098,42 +3099,55 @@
             <a:spLocks noGrp="1"/>
           </p:cNvSpPr>
           <p:nvPr>
-            <p:ph type="ctrTitle"/>
-          </p:nvPr>
-        </p:nvSpPr>
-        <p:spPr/>
-        <p:txBody>
-          <a:bodyPr/>
-          <a:lstStyle/>
-          <a:p>
-            <a:r>
-              <a:t>Project update deck - EMP071</a:t>
-            </a:r>
-          </a:p>
-        </p:txBody>
-      </p:sp>
-      <p:sp>
-        <p:nvSpPr>
-          <p:cNvPr id="3" name="Subtitle 2"/>
-          <p:cNvSpPr>
-            <a:spLocks noGrp="1"/>
-          </p:cNvSpPr>
-          <p:nvPr>
-            <p:ph type="subTitle" idx="1"/>
-          </p:nvPr>
-        </p:nvSpPr>
-        <p:spPr/>
-        <p:txBody>
-          <a:bodyPr/>
-          <a:lstStyle/>
-          <a:p>
-            <a:r>
-              <a:t>Alex Garcia | Director | R&amp;D</a:t>
-            </a:r>
-          </a:p>
-          <a:p>
-            <a:r>
-              <a:t>Prepared: 2025-03-14</a:t>
+            <p:ph type="title"/>
+          </p:nvPr>
+        </p:nvSpPr>
+        <p:spPr/>
+        <p:txBody>
+          <a:bodyPr/>
+          <a:lstStyle/>
+          <a:p>
+            <a:r>
+              <a:t>Ast Emp071 01 - EMP071</a:t>
+            </a:r>
+          </a:p>
+        </p:txBody>
+      </p:sp>
+      <p:sp>
+        <p:nvSpPr>
+          <p:cNvPr id="3" name="Content Placeholder 2"/>
+          <p:cNvSpPr>
+            <a:spLocks noGrp="1"/>
+          </p:cNvSpPr>
+          <p:nvPr>
+            <p:ph idx="1"/>
+          </p:nvPr>
+        </p:nvSpPr>
+        <p:spPr/>
+        <p:txBody>
+          <a:bodyPr/>
+          <a:lstStyle/>
+          <a:p>
+            <a:r>
+              <a:t>Slide 1: Executive Summary</a:t>
+            </a:r>
+          </a:p>
+          <a:p>
+            <a:pPr lvl="1"/>
+            <a:r>
+              <a:t>Section 1: Operational risk review. EMP071 contributes to ast emp071 01 through recurring collaboration, clear ownership boundaries, and measurable outcomes. The team captures decisions, open issues, and handoffs so that knowledge remains discoverable for future programs.</a:t>
+            </a:r>
+          </a:p>
+          <a:p>
+            <a:pPr lvl="1"/>
+            <a:r>
+              <a:t>Section 2: Fabric semantic model planning. EMP071 contributes to ast emp071 01 through recurring collaboration, clear ownership boundaries, and measurable outcomes. The team captures decisions, open issues, and handoffs so that knowledge remains discoverable for future programs.</a:t>
+            </a:r>
+          </a:p>
+          <a:p>
+            <a:pPr lvl="1"/>
+            <a:r>
+              <a:t>Section 3: Automation backlog refinement. EMP071 contributes to ast emp071 01 through recurring collaboration, clear ownership boundaries, and measurable outcomes. The team captures decisions, open issues, and handoffs so that knowledge remains discoverable for future programs.</a:t>
             </a:r>
           </a:p>
         </p:txBody>
@@ -3172,7 +3186,7 @@
           <a:lstStyle/>
           <a:p>
             <a:r>
-              <a:t>Research Portfolio Status</a:t>
+              <a:t>Ast Emp071 01 - EMP071</a:t>
             </a:r>
           </a:p>
         </p:txBody>
@@ -3193,17 +3207,25 @@
           <a:lstStyle/>
           <a:p>
             <a:r>
-              <a:t>Overview of Research Portfolio Status for R&amp;D department.</a:t>
-            </a:r>
-          </a:p>
-          <a:p>
-            <a:r>
-              <a:t>Responsible: Alex Garcia (Director)</a:t>
-            </a:r>
-          </a:p>
-          <a:p>
-            <a:r>
-              <a:t>Location: Hsinchu | Skills: SQL, MLOps, Python, Kusto</a:t>
+              <a:t>Slide 2: Executive Summary</a:t>
+            </a:r>
+          </a:p>
+          <a:p>
+            <a:pPr lvl="1"/>
+            <a:r>
+              <a:t>Section 1: Department KPI performance. EMP071 contributes to ast emp071 01 through recurring collaboration, clear ownership boundaries, and measurable outcomes. The team captures decisions, open issues, and handoffs so that knowledge remains discoverable for future programs.</a:t>
+            </a:r>
+          </a:p>
+          <a:p>
+            <a:pPr lvl="1"/>
+            <a:r>
+              <a:t>Section 2: Quarterly delivery milestones. EMP071 contributes to ast emp071 01 through recurring collaboration, clear ownership boundaries, and measurable outcomes. The team captures decisions, open issues, and handoffs so that knowledge remains discoverable for future programs.</a:t>
+            </a:r>
+          </a:p>
+          <a:p>
+            <a:pPr lvl="1"/>
+            <a:r>
+              <a:t>Section 3: Data quality remediation. EMP071 contributes to ast emp071 01 through recurring collaboration, clear ownership boundaries, and measurable outcomes. The team captures decisions, open issues, and handoffs so that knowledge remains discoverable for future programs.</a:t>
             </a:r>
           </a:p>
         </p:txBody>
@@ -3242,7 +3264,7 @@
           <a:lstStyle/>
           <a:p>
             <a:r>
-              <a:t>IP Filing Pipeline</a:t>
+              <a:t>Ast Emp071 01 - EMP071</a:t>
             </a:r>
           </a:p>
         </p:txBody>
@@ -3263,17 +3285,25 @@
           <a:lstStyle/>
           <a:p>
             <a:r>
-              <a:t>Overview of IP Filing Pipeline for R&amp;D department.</a:t>
-            </a:r>
-          </a:p>
-          <a:p>
-            <a:r>
-              <a:t>Responsible: Alex Garcia (Director)</a:t>
-            </a:r>
-          </a:p>
-          <a:p>
-            <a:r>
-              <a:t>Location: Hsinchu | Skills: SQL, MLOps, Python, Kusto</a:t>
+              <a:t>Slide 3: Executive Summary</a:t>
+            </a:r>
+          </a:p>
+          <a:p>
+            <a:pPr lvl="1"/>
+            <a:r>
+              <a:t>Section 1: Customer escalation analysis. EMP071 contributes to ast emp071 01 through recurring collaboration, clear ownership boundaries, and measurable outcomes. The team captures decisions, open issues, and handoffs so that knowledge remains discoverable for future programs.</a:t>
+            </a:r>
+          </a:p>
+          <a:p>
+            <a:pPr lvl="1"/>
+            <a:r>
+              <a:t>Section 2: Customer escalation analysis. EMP071 contributes to ast emp071 01 through recurring collaboration, clear ownership boundaries, and measurable outcomes. The team captures decisions, open issues, and handoffs so that knowledge remains discoverable for future programs.</a:t>
+            </a:r>
+          </a:p>
+          <a:p>
+            <a:pPr lvl="1"/>
+            <a:r>
+              <a:t>Section 3: Operational risk review. EMP071 contributes to ast emp071 01 through recurring collaboration, clear ownership boundaries, and measurable outcomes. The team captures decisions, open issues, and handoffs so that knowledge remains discoverable for future programs.</a:t>
             </a:r>
           </a:p>
         </p:txBody>
@@ -3312,7 +3342,7 @@
           <a:lstStyle/>
           <a:p>
             <a:r>
-              <a:t>Technology Readiness Levels</a:t>
+              <a:t>Ast Emp071 01 - EMP071</a:t>
             </a:r>
           </a:p>
         </p:txBody>
@@ -3333,17 +3363,103 @@
           <a:lstStyle/>
           <a:p>
             <a:r>
-              <a:t>Overview of Technology Readiness Levels for R&amp;D department.</a:t>
-            </a:r>
-          </a:p>
-          <a:p>
-            <a:r>
-              <a:t>Responsible: Alex Garcia (Director)</a:t>
-            </a:r>
-          </a:p>
-          <a:p>
-            <a:r>
-              <a:t>Location: Hsinchu | Skills: SQL, MLOps, Python, Kusto</a:t>
+              <a:t>Slide 4: Executive Summary</a:t>
+            </a:r>
+          </a:p>
+          <a:p>
+            <a:pPr lvl="1"/>
+            <a:r>
+              <a:t>Section 1: Customer escalation analysis. EMP071 contributes to ast emp071 01 through recurring collaboration, clear ownership boundaries, and measurable outcomes. The team captures decisions, open issues, and handoffs so that knowledge remains discoverable for future programs.</a:t>
+            </a:r>
+          </a:p>
+          <a:p>
+            <a:pPr lvl="1"/>
+            <a:r>
+              <a:t>Section 2: Quarterly delivery milestones. EMP071 contributes to ast emp071 01 through recurring collaboration, clear ownership boundaries, and measurable outcomes. The team captures decisions, open issues, and handoffs so that knowledge remains discoverable for future programs.</a:t>
+            </a:r>
+          </a:p>
+          <a:p>
+            <a:pPr lvl="1"/>
+            <a:r>
+              <a:t>Section 3: Knowledge transfer and onboarding. EMP071 contributes to ast emp071 01 through recurring collaboration, clear ownership boundaries, and measurable outcomes. The team captures decisions, open issues, and handoffs so that knowledge remains discoverable for future programs.</a:t>
+            </a:r>
+          </a:p>
+        </p:txBody>
+      </p:sp>
+    </p:spTree>
+  </p:cSld>
+  <p:clrMapOvr>
+    <a:masterClrMapping/>
+  </p:clrMapOvr>
+</p:sld>
+</file>
+
+<file path=ppt/slides/slide5.xml><?xml version="1.0" encoding="utf-8"?>
+<p:sld xmlns:a="http://schemas.openxmlformats.org/drawingml/2006/main" xmlns:p="http://schemas.openxmlformats.org/presentationml/2006/main" xmlns:r="http://schemas.openxmlformats.org/officeDocument/2006/relationships">
+  <p:cSld>
+    <p:spTree>
+      <p:nvGrpSpPr>
+        <p:cNvPr id="1" name=""/>
+        <p:cNvGrpSpPr/>
+        <p:nvPr/>
+      </p:nvGrpSpPr>
+      <p:grpSpPr/>
+      <p:sp>
+        <p:nvSpPr>
+          <p:cNvPr id="2" name="Title 1"/>
+          <p:cNvSpPr>
+            <a:spLocks noGrp="1"/>
+          </p:cNvSpPr>
+          <p:nvPr>
+            <p:ph type="title"/>
+          </p:nvPr>
+        </p:nvSpPr>
+        <p:spPr/>
+        <p:txBody>
+          <a:bodyPr/>
+          <a:lstStyle/>
+          <a:p>
+            <a:r>
+              <a:t>Ast Emp071 01 - EMP071</a:t>
+            </a:r>
+          </a:p>
+        </p:txBody>
+      </p:sp>
+      <p:sp>
+        <p:nvSpPr>
+          <p:cNvPr id="3" name="Content Placeholder 2"/>
+          <p:cNvSpPr>
+            <a:spLocks noGrp="1"/>
+          </p:cNvSpPr>
+          <p:nvPr>
+            <p:ph idx="1"/>
+          </p:nvPr>
+        </p:nvSpPr>
+        <p:spPr/>
+        <p:txBody>
+          <a:bodyPr/>
+          <a:lstStyle/>
+          <a:p>
+            <a:r>
+              <a:t>Slide 5: Executive Summary</a:t>
+            </a:r>
+          </a:p>
+          <a:p>
+            <a:pPr lvl="1"/>
+            <a:r>
+              <a:t>Section 1: Fabric semantic model planning. EMP071 contributes to ast emp071 01 through recurring collaboration, clear ownership boundaries, and measurable outcomes. The team captures decisions, open issues, and handoffs so that knowledge remains discoverable for future programs.</a:t>
+            </a:r>
+          </a:p>
+          <a:p>
+            <a:pPr lvl="1"/>
+            <a:r>
+              <a:t>Section 2: Fabric semantic model planning. EMP071 contributes to ast emp071 01 through recurring collaboration, clear ownership boundaries, and measurable outcomes. The team captures decisions, open issues, and handoffs so that knowledge remains discoverable for future programs.</a:t>
+            </a:r>
+          </a:p>
+          <a:p>
+            <a:pPr lvl="1"/>
+            <a:r>
+              <a:t>Section 3: Department KPI performance. EMP071 contributes to ast emp071 01 through recurring collaboration, clear ownership boundaries, and measurable outcomes. The team captures decisions, open issues, and handoffs so that knowledge remains discoverable for future programs.</a:t>
             </a:r>
           </a:p>
         </p:txBody>
